--- a/it/slides/11-Architettura_dei_Calcolatori-Macchine_Combinatorie-Lab.pptx
+++ b/it/slides/11-Architettura_dei_Calcolatori-Macchine_Combinatorie-Lab.pptx
@@ -122,45 +122,45 @@
   <p:extLst>
     <p:ext uri="{521415D9-36F7-43E2-AB2F-B90AF26B5E84}">
       <p14:sectionLst xmlns:p14="http://schemas.microsoft.com/office/powerpoint/2010/main">
-        <p14:section name="Apertura" id="{dcc87641-09ab-9c8d-d234-53bd1bbb9222}">
+        <p14:section name="Apertura" id="{4836a441-51a0-e12a-b32d-7588c2e13801}">
           <p14:sldIdLst>
             <p14:sldId id="256"/>
             <p14:sldId id="257"/>
           </p14:sldIdLst>
         </p14:section>
-        <p14:section name="Riscaldamento sulla macchina" id="{9076f0e1-5b7b-93c5-fdab-2519312b074a}">
+        <p14:section name="Riscaldamento sulla macchina" id="{1e09ec9f-e36e-2270-1e7b-90db197defbd}">
           <p14:sldIdLst>
             <p14:sldId id="258"/>
           </p14:sldIdLst>
         </p14:section>
-        <p14:section name="Decodificatori e codificatori" id="{02ad567d-3c7a-a035-a35c-0386379bc8ef}">
+        <p14:section name="Decodificatori e codificatori" id="{58259bd9-1e23-2d41-3f3f-f78570897c19}">
           <p14:sldIdLst>
             <p14:sldId id="259"/>
           </p14:sldIdLst>
         </p14:section>
-        <p14:section name="Multiplexer e demultiplexer" id="{963be6aa-3315-da52-367e-b369cf0f434b}">
+        <p14:section name="Multiplexer e demultiplexer" id="{d17ef533-b501-f762-0762-56e810685219}">
           <p14:sldIdLst>
             <p14:sldId id="260"/>
           </p14:sldIdLst>
         </p14:section>
-        <p14:section name="Confrontare e controllare" id="{0b953bef-1cf1-0bbf-6edb-2785d3f40afe}">
+        <p14:section name="Confrontare e controllare" id="{ab0a81c3-a29b-b025-8022-3eecb7428808}">
           <p14:sldIdLst>
             <p14:sldId id="261"/>
           </p14:sldIdLst>
         </p14:section>
-        <p14:section name="L'unità aritmetico-logica" id="{2ffb7da3-2dcf-0a87-9159-947aa844637c}">
+        <p14:section name="L'unità aritmetico-logica" id="{1a5569d2-6026-366d-e823-0a93f25e5e39}">
           <p14:sldIdLst>
             <p14:sldId id="262"/>
           </p14:sldIdLst>
         </p14:section>
-        <p14:section name="Il programma completo" id="{216e1fef-d5e3-62bd-8ff3-2fd62df57322}">
+        <p14:section name="Il programma completo" id="{e441ae35-0c4e-9051-aab2-c28813f1c239}">
           <p14:sldIdLst>
             <p14:sldId id="263"/>
             <p14:sldId id="264"/>
             <p14:sldId id="265"/>
           </p14:sldIdLst>
         </p14:section>
-        <p14:section name="Eseguire e provare" id="{fc6dc007-da68-077b-e3cf-9dbaf04df465}">
+        <p14:section name="Eseguire e provare" id="{cf85a1a1-08b5-1c96-57f7-5ed658176ee6}">
           <p14:sldIdLst>
             <p14:sldId id="266"/>
             <p14:sldId id="267"/>
@@ -169,7 +169,7 @@
             <p14:sldId id="270"/>
           </p14:sldIdLst>
         </p14:section>
-        <p14:section name="Esercizi" id="{dd52b2f8-c24d-6f9b-d0fb-c47731befb1b}">
+        <p14:section name="Esercizi" id="{f902277c-f945-5d6e-a1d5-6731cc64f174}">
           <p14:sldIdLst>
             <p14:sldId id="271"/>
           </p14:sldIdLst>

--- a/it/slides/11-Architettura_dei_Calcolatori-Macchine_Combinatorie-Lab.pptx
+++ b/it/slides/11-Architettura_dei_Calcolatori-Macchine_Combinatorie-Lab.pptx
@@ -122,45 +122,45 @@
   <p:extLst>
     <p:ext uri="{521415D9-36F7-43E2-AB2F-B90AF26B5E84}">
       <p14:sectionLst xmlns:p14="http://schemas.microsoft.com/office/powerpoint/2010/main">
-        <p14:section name="Apertura" id="{4836a441-51a0-e12a-b32d-7588c2e13801}">
+        <p14:section name="Apertura" id="{40869b14-d40a-5405-a350-054dc5e13e45}">
           <p14:sldIdLst>
             <p14:sldId id="256"/>
             <p14:sldId id="257"/>
           </p14:sldIdLst>
         </p14:section>
-        <p14:section name="Riscaldamento sulla macchina" id="{1e09ec9f-e36e-2270-1e7b-90db197defbd}">
+        <p14:section name="Riscaldamento sulla macchina" id="{28fc7dd6-d9a9-5fdd-cf9a-d7ba16a6fe01}">
           <p14:sldIdLst>
             <p14:sldId id="258"/>
           </p14:sldIdLst>
         </p14:section>
-        <p14:section name="Decodificatori e codificatori" id="{58259bd9-1e23-2d41-3f3f-f78570897c19}">
+        <p14:section name="Decodificatori e codificatori" id="{096b61f5-1d10-04f2-d55b-72afd2ed55f9}">
           <p14:sldIdLst>
             <p14:sldId id="259"/>
           </p14:sldIdLst>
         </p14:section>
-        <p14:section name="Multiplexer e demultiplexer" id="{d17ef533-b501-f762-0762-56e810685219}">
+        <p14:section name="Multiplexer e demultiplexer" id="{7f49bc33-ee6b-53cc-1e6c-d2c2b00f5697}">
           <p14:sldIdLst>
             <p14:sldId id="260"/>
           </p14:sldIdLst>
         </p14:section>
-        <p14:section name="Confrontare e controllare" id="{ab0a81c3-a29b-b025-8022-3eecb7428808}">
+        <p14:section name="Confrontare e controllare" id="{d59f9bde-53f8-1e0a-e72e-1edcc103b74d}">
           <p14:sldIdLst>
             <p14:sldId id="261"/>
           </p14:sldIdLst>
         </p14:section>
-        <p14:section name="L'unità aritmetico-logica" id="{1a5569d2-6026-366d-e823-0a93f25e5e39}">
+        <p14:section name="L'unità aritmetico-logica" id="{53f93dd1-a222-0dce-2b1e-dc03364a80ad}">
           <p14:sldIdLst>
             <p14:sldId id="262"/>
           </p14:sldIdLst>
         </p14:section>
-        <p14:section name="Il programma completo" id="{e441ae35-0c4e-9051-aab2-c28813f1c239}">
+        <p14:section name="Il programma completo" id="{9d3407f8-9170-2ae6-51e5-c3a47bdab412}">
           <p14:sldIdLst>
             <p14:sldId id="263"/>
             <p14:sldId id="264"/>
             <p14:sldId id="265"/>
           </p14:sldIdLst>
         </p14:section>
-        <p14:section name="Eseguire e provare" id="{cf85a1a1-08b5-1c96-57f7-5ed658176ee6}">
+        <p14:section name="Eseguire e provare" id="{e45a5375-e1a0-9966-a113-dd266a5d4275}">
           <p14:sldIdLst>
             <p14:sldId id="266"/>
             <p14:sldId id="267"/>
@@ -169,7 +169,7 @@
             <p14:sldId id="270"/>
           </p14:sldIdLst>
         </p14:section>
-        <p14:section name="Esercizi" id="{f902277c-f945-5d6e-a1d5-6731cc64f174}">
+        <p14:section name="Esercizi" id="{5dd8616e-af68-ac2a-4511-47dbff8e5aac}">
           <p14:sldIdLst>
             <p14:sldId id="271"/>
           </p14:sldIdLst>
@@ -580,7 +580,9 @@
               <a:rPr lang="en-US" dirty="0"/>
               <a:t>Questa è la presentazione del codice della Lezione 11. Mentre la presentazione della lezione sviluppa i concetti, questa raccoglie tutto ciò che si scrive e si esegue: ogni listato con il suo commento, il programma completo della lezione, il risultato che deve produrre, e la procedura per provarlo su ciascuno dei tre host. Le due presentazioni vanno lette insieme: i concetti spiegano il codice, e il codice dà ai concetti una conseguenza osservabile.
 Stato di apprendimento: DA COMPRENDERE OGGI, alla fine di questa lezione lo spiegate, lo seguite passo passo e lo applicate da soli; DA UTILIZZARE OGGI, oggi seguite e usate la ricetta; come funziona dentro si spiega più avanti, o non fa parte del corso; DA COMPRENDERE PIÙ AVANTI, riconoscete il nome e lo scopo; lo spiega una lezione successiva. Una slide senza etichetta è contesto: una storia, un esempio, una domanda, un esercizio.
-Stato di apprendimento di questa lezione. DA COMPRENDERE OGGI: i multiplexer; le reti combinatorie; i codici; decoder ed encoder; comparatori e parità; l'ALU. DA UTILIZZARE OGGI: il programma completo, gli strumenti di PRG32 (si usa, non si studia, in questo corso). DA COMPRENDERE PIÙ AVANTI: macchine a stati finiti (Lezione 13). Una slide senza etichetta è contesto: una storia, un esempio, una domanda, un esercizio.</a:t>
+Stato di apprendimento di questa lezione. DA COMPRENDERE OGGI: i multiplexer; le reti combinatorie; i codici; decoder ed encoder; comparatori e parità; l'ALU. DA UTILIZZARE OGGI: il programma completo, gli strumenti di PRG32 (si usa, non si studia, in questo corso). DA COMPRENDERE PIÙ AVANTI: macchine a stati finiti (Lezione 13). Una slide senza etichetta è contesto: una storia, un esempio, una domanda, un esercizio.
+Percorso. I risultati di oggi: (1) distinguere una macchina combinatoria da una sequenziale; (2) usare decodificatori, multiplexer, comparatori e parità; (3) spiegare l'ALU come unità in parallelo e un multiplexer. Si appoggia su: solo ciò che ha preparato la Lezione 01. Prossimo passo: Lezione 12, Verm1, parte 2: la guida, il cibo e un punteggio.
+Ponte. Nella Lezione 02 un'istruzione era un numero a 32 bit, e il processore in qualche modo sapeva che cosa farne. Oggi un decodificatore legge un campo di quel numero, funct3, e pilota il multiplexer che sceglie il risultato dell'ALU. La Lezione 19 descrive tutti i campi e il ciclo di prelievo, decodifica, esecuzione. Richiamo: Quale parte della parola di un'istruzione dice all'ALU di sommare invece di calcolare un AND?</a:t>
             </a:r>
             <a:endParaRPr lang="en-US" dirty="0"/>
           </a:p>
